--- a/Modul Minna 2/Bab 46/46. Minna 2 Tata Bahasa Bab 46 - Slide.pptx
+++ b/Modul Minna 2/Bab 46/46. Minna 2 Tata Bahasa Bab 46 - Slide.pptx
@@ -3151,7 +3151,7 @@
                 <a:ea typeface="Arial" pitchFamily="34" charset="-122"/>
                 <a:cs typeface="Arial" pitchFamily="34" charset="-120"/>
               </a:rPr>
-              <a:t>Sdr. Budi seharusnya datang hari ini.</a:t>
+              <a:t>Budi seharusnya datang hari ini.</a:t>
             </a:r>
             <a:endParaRPr lang="en-US" sz="950" dirty="0"/>
           </a:p>
